--- a/tests/fixtures/sample.pptx
+++ b/tests/fixtures/sample.pptx
@@ -3104,7 +3104,7 @@
           <a:lstStyle/>
           <a:p>
             <a:r>
-              <a:t>康医通系统</a:t>
+              <a:t>港湾通系统</a:t>
             </a:r>
           </a:p>
         </p:txBody>
@@ -3125,7 +3125,7 @@
           <a:lstStyle/>
           <a:p>
             <a:r>
-              <a:t>营养咨询模块概述</a:t>
+              <a:t>示例咨询模块概述</a:t>
             </a:r>
           </a:p>
         </p:txBody>
